--- a/examples/legacy-campaign-route-demo/outputs/tech-route.pptx
+++ b/examples/legacy-campaign-route-demo/outputs/tech-route.pptx
@@ -119,18 +119,7 @@
                   <a:srgbClr val="111827"/>
                 </a:solidFill>
               </a:rPr>
-              <a:t>Research Tool</a:t>
-            </a:r>
-          </a:p>
-          <a:p>
-            <a:pPr algn="ctr"/>
-            <a:r>
-              <a:rPr lang="en-US" sz="2100" b="1">
-                <a:solidFill>
-                  <a:srgbClr val="111827"/>
-                </a:solidFill>
-              </a:rPr>
-              <a:t>Launch Campaign</a:t>
+              <a:t>Legacy Campaign</a:t>
             </a:r>
           </a:p>
           <a:p>
@@ -180,7 +169,7 @@
                   <a:srgbClr val="5B6472"/>
                 </a:solidFill>
               </a:rPr>
-              <a:t>Campaign route</a:t>
+              <a:t>Experimental</a:t>
             </a:r>
           </a:p>
           <a:p>
@@ -191,7 +180,7 @@
                   <a:srgbClr val="5B6472"/>
                 </a:solidFill>
               </a:rPr>
-              <a:t>generated by</a:t>
+              <a:t>campaign route</a:t>
             </a:r>
           </a:p>
           <a:p>
@@ -202,7 +191,18 @@
                   <a:srgbClr val="5B6472"/>
                 </a:solidFill>
               </a:rPr>
-              <a:t>tech-route-maker</a:t>
+              <a:t>retained for</a:t>
+            </a:r>
+          </a:p>
+          <a:p>
+            <a:pPr algn="ctr"/>
+            <a:r>
+              <a:rPr lang="en-US" sz="850">
+                <a:solidFill>
+                  <a:srgbClr val="5B6472"/>
+                </a:solidFill>
+              </a:rPr>
+              <a:t>explicit...</a:t>
             </a:r>
           </a:p>
         </p:txBody>
@@ -216,7 +216,7 @@
         <p:spPr>
           <a:xfrm>
             <a:off x="765823" y="1976097"/>
-            <a:ext cx="1619112" cy="3352852"/>
+            <a:ext cx="1980762" cy="3352852"/>
           </a:xfrm>
           <a:prstGeom prst="roundRect">
             <a:avLst/>
@@ -255,7 +255,7 @@
         <p:spPr>
           <a:xfrm>
             <a:off x="765823" y="1976097"/>
-            <a:ext cx="1619112" cy="326688"/>
+            <a:ext cx="1980762" cy="326688"/>
           </a:xfrm>
           <a:prstGeom prst="roundRect">
             <a:avLst/>
@@ -293,8 +293,8 @@
         </p:nvSpPr>
         <p:spPr>
           <a:xfrm>
-            <a:off x="2574071" y="1976097"/>
-            <a:ext cx="1619112" cy="3352852"/>
+            <a:off x="2935721" y="1976097"/>
+            <a:ext cx="1980762" cy="3352852"/>
           </a:xfrm>
           <a:prstGeom prst="roundRect">
             <a:avLst/>
@@ -332,8 +332,8 @@
         </p:nvSpPr>
         <p:spPr>
           <a:xfrm>
-            <a:off x="2574071" y="1976097"/>
-            <a:ext cx="1619112" cy="326688"/>
+            <a:off x="2935721" y="1976097"/>
+            <a:ext cx="1980762" cy="326688"/>
           </a:xfrm>
           <a:prstGeom prst="roundRect">
             <a:avLst/>
@@ -371,8 +371,8 @@
         </p:nvSpPr>
         <p:spPr>
           <a:xfrm>
-            <a:off x="4382319" y="1976097"/>
-            <a:ext cx="1619112" cy="3352852"/>
+            <a:off x="5105618" y="1976097"/>
+            <a:ext cx="1980762" cy="3352852"/>
           </a:xfrm>
           <a:prstGeom prst="roundRect">
             <a:avLst/>
@@ -410,8 +410,8 @@
         </p:nvSpPr>
         <p:spPr>
           <a:xfrm>
-            <a:off x="4382319" y="1976097"/>
-            <a:ext cx="1619112" cy="326688"/>
+            <a:off x="5105618" y="1976097"/>
+            <a:ext cx="1980762" cy="326688"/>
           </a:xfrm>
           <a:prstGeom prst="roundRect">
             <a:avLst/>
@@ -449,8 +449,8 @@
         </p:nvSpPr>
         <p:spPr>
           <a:xfrm>
-            <a:off x="6190567" y="1976097"/>
-            <a:ext cx="1619112" cy="3352852"/>
+            <a:off x="7275516" y="1976097"/>
+            <a:ext cx="1980762" cy="3352852"/>
           </a:xfrm>
           <a:prstGeom prst="roundRect">
             <a:avLst/>
@@ -488,8 +488,8 @@
         </p:nvSpPr>
         <p:spPr>
           <a:xfrm>
-            <a:off x="6190567" y="1976097"/>
-            <a:ext cx="1619112" cy="326688"/>
+            <a:off x="7275516" y="1976097"/>
+            <a:ext cx="1980762" cy="326688"/>
           </a:xfrm>
           <a:prstGeom prst="roundRect">
             <a:avLst/>
@@ -527,8 +527,8 @@
         </p:nvSpPr>
         <p:spPr>
           <a:xfrm>
-            <a:off x="7998815" y="1976097"/>
-            <a:ext cx="1619112" cy="3352852"/>
+            <a:off x="9445414" y="1976097"/>
+            <a:ext cx="1980762" cy="3352852"/>
           </a:xfrm>
           <a:prstGeom prst="roundRect">
             <a:avLst/>
@@ -566,8 +566,8 @@
         </p:nvSpPr>
         <p:spPr>
           <a:xfrm>
-            <a:off x="7998815" y="1976097"/>
-            <a:ext cx="1619112" cy="326688"/>
+            <a:off x="9445414" y="1976097"/>
+            <a:ext cx="1980762" cy="326688"/>
           </a:xfrm>
           <a:prstGeom prst="roundRect">
             <a:avLst/>
@@ -597,84 +597,50 @@
           </a:p>
         </p:txBody>
       </p:sp>
-      <p:sp>
-        <p:nvSpPr>
-          <p:cNvPr id="14" name="Stage Optimization"/>
-          <p:cNvSpPr/>
-          <p:nvPr/>
-        </p:nvSpPr>
-        <p:spPr>
-          <a:xfrm>
-            <a:off x="9807063" y="1976097"/>
-            <a:ext cx="1619112" cy="3352852"/>
-          </a:xfrm>
-          <a:prstGeom prst="roundRect">
-            <a:avLst/>
-          </a:prstGeom>
-          <a:solidFill>
-            <a:srgbClr val="E0F2FE"/>
-          </a:solidFill>
-          <a:ln w="12700">
-            <a:solidFill>
-              <a:srgbClr val="FDA4AF"/>
-            </a:solidFill>
-          </a:ln>
-        </p:spPr>
-        <p:txBody>
-          <a:bodyPr wrap="square" anchor="ctr"/>
-          <a:lstStyle/>
-          <a:p>
-            <a:pPr algn="ctr"/>
-            <a:r>
-              <a:rPr lang="en-US" sz="1000">
-                <a:solidFill>
-                  <a:srgbClr val="111827"/>
-                </a:solidFill>
-              </a:rPr>
-              <a:t/>
-            </a:r>
-          </a:p>
-        </p:txBody>
-      </p:sp>
-      <p:sp>
-        <p:nvSpPr>
-          <p:cNvPr id="15" name="Header Optimization"/>
-          <p:cNvSpPr/>
-          <p:nvPr/>
-        </p:nvSpPr>
-        <p:spPr>
-          <a:xfrm>
-            <a:off x="9807063" y="1976097"/>
-            <a:ext cx="1619112" cy="326688"/>
-          </a:xfrm>
-          <a:prstGeom prst="roundRect">
-            <a:avLst/>
-          </a:prstGeom>
-          <a:solidFill>
-            <a:srgbClr val="E11D48"/>
-          </a:solidFill>
-          <a:ln w="12700">
-            <a:solidFill>
-              <a:srgbClr val="E11D48"/>
-            </a:solidFill>
-          </a:ln>
-        </p:spPr>
-        <p:txBody>
-          <a:bodyPr wrap="square" anchor="ctr"/>
-          <a:lstStyle/>
-          <a:p>
-            <a:pPr algn="ctr"/>
-            <a:r>
-              <a:rPr lang="en-US" sz="1100" b="1">
-                <a:solidFill>
-                  <a:srgbClr val="FFFFFF"/>
-                </a:solidFill>
-              </a:rPr>
-              <a:t>Optimization</a:t>
-            </a:r>
-          </a:p>
-        </p:txBody>
-      </p:sp>
+      <p:cxnSp>
+        <p:nvCxnSpPr>
+          <p:cNvPr id="14" name="Connector 14"/>
+          <p:cNvCxnSpPr/>
+          <p:nvPr/>
+        </p:nvCxnSpPr>
+        <p:spPr>
+          <a:xfrm>
+            <a:off x="1756204" y="2827205"/>
+            <a:ext cx="1" cy="670570"/>
+          </a:xfrm>
+          <a:prstGeom prst="line">
+            <a:avLst/>
+          </a:prstGeom>
+          <a:ln w="19050">
+            <a:solidFill>
+              <a:srgbClr val="E11D48"/>
+            </a:solidFill>
+            <a:headEnd type="triangle"/>
+          </a:ln>
+        </p:spPr>
+      </p:cxnSp>
+      <p:cxnSp>
+        <p:nvCxnSpPr>
+          <p:cNvPr id="15" name="Connector 15"/>
+          <p:cNvCxnSpPr/>
+          <p:nvPr/>
+        </p:nvCxnSpPr>
+        <p:spPr>
+          <a:xfrm flipV="1">
+            <a:off x="1756204" y="2827205"/>
+            <a:ext cx="2169897" cy="670570"/>
+          </a:xfrm>
+          <a:prstGeom prst="line">
+            <a:avLst/>
+          </a:prstGeom>
+          <a:ln w="19050">
+            <a:solidFill>
+              <a:srgbClr val="E11D48"/>
+            </a:solidFill>
+            <a:headEnd type="triangle"/>
+          </a:ln>
+        </p:spPr>
+      </p:cxnSp>
       <p:cxnSp>
         <p:nvCxnSpPr>
           <p:cNvPr id="16" name="Connector 16"/>
@@ -683,7 +649,7 @@
         </p:nvCxnSpPr>
         <p:spPr>
           <a:xfrm>
-            <a:off x="1575379" y="2827205"/>
+            <a:off x="3926102" y="2827205"/>
             <a:ext cx="1" cy="670570"/>
           </a:xfrm>
           <a:prstGeom prst="line">
@@ -705,8 +671,8 @@
         </p:nvCxnSpPr>
         <p:spPr>
           <a:xfrm flipV="1">
-            <a:off x="1575379" y="2827205"/>
-            <a:ext cx="1808248" cy="670570"/>
+            <a:off x="3926102" y="2827205"/>
+            <a:ext cx="2169897" cy="670570"/>
           </a:xfrm>
           <a:prstGeom prst="line">
             <a:avLst/>
@@ -727,7 +693,7 @@
         </p:nvCxnSpPr>
         <p:spPr>
           <a:xfrm>
-            <a:off x="3383627" y="2827205"/>
+            <a:off x="6095999" y="2827205"/>
             <a:ext cx="1" cy="670570"/>
           </a:xfrm>
           <a:prstGeom prst="line">
@@ -749,8 +715,8 @@
         </p:nvCxnSpPr>
         <p:spPr>
           <a:xfrm flipV="1">
-            <a:off x="3383627" y="2827205"/>
-            <a:ext cx="1808248" cy="670570"/>
+            <a:off x="6095999" y="2827205"/>
+            <a:ext cx="2169897" cy="670570"/>
           </a:xfrm>
           <a:prstGeom prst="line">
             <a:avLst/>
@@ -771,7 +737,7 @@
         </p:nvCxnSpPr>
         <p:spPr>
           <a:xfrm>
-            <a:off x="5191875" y="2827205"/>
+            <a:off x="8265897" y="2827205"/>
             <a:ext cx="1" cy="670570"/>
           </a:xfrm>
           <a:prstGeom prst="line">
@@ -793,8 +759,8 @@
         </p:nvCxnSpPr>
         <p:spPr>
           <a:xfrm flipV="1">
-            <a:off x="5191875" y="2827205"/>
-            <a:ext cx="1808248" cy="670570"/>
+            <a:off x="8265897" y="2827205"/>
+            <a:ext cx="2169897" cy="670570"/>
           </a:xfrm>
           <a:prstGeom prst="line">
             <a:avLst/>
@@ -815,7 +781,7 @@
         </p:nvCxnSpPr>
         <p:spPr>
           <a:xfrm>
-            <a:off x="7000124" y="2827205"/>
+            <a:off x="10435795" y="2827205"/>
             <a:ext cx="1" cy="670570"/>
           </a:xfrm>
           <a:prstGeom prst="line">
@@ -836,9 +802,9 @@
           <p:nvPr/>
         </p:nvCxnSpPr>
         <p:spPr>
-          <a:xfrm flipV="1">
-            <a:off x="7000124" y="2827205"/>
-            <a:ext cx="1808248" cy="670570"/>
+          <a:xfrm flipH="1" flipV="1">
+            <a:off x="6095999" y="2827205"/>
+            <a:ext cx="4339795" cy="670570"/>
           </a:xfrm>
           <a:prstGeom prst="line">
             <a:avLst/>
@@ -851,82 +817,16 @@
           </a:ln>
         </p:spPr>
       </p:cxnSp>
-      <p:cxnSp>
-        <p:nvCxnSpPr>
-          <p:cNvPr id="24" name="Connector 24"/>
-          <p:cNvCxnSpPr/>
-          <p:nvPr/>
-        </p:nvCxnSpPr>
-        <p:spPr>
-          <a:xfrm>
-            <a:off x="8808372" y="2827205"/>
-            <a:ext cx="1" cy="670570"/>
-          </a:xfrm>
-          <a:prstGeom prst="line">
-            <a:avLst/>
-          </a:prstGeom>
-          <a:ln w="19050">
-            <a:solidFill>
-              <a:srgbClr val="E11D48"/>
-            </a:solidFill>
-            <a:headEnd type="triangle"/>
-          </a:ln>
-        </p:spPr>
-      </p:cxnSp>
-      <p:cxnSp>
-        <p:nvCxnSpPr>
-          <p:cNvPr id="25" name="Connector 25"/>
-          <p:cNvCxnSpPr/>
-          <p:nvPr/>
-        </p:nvCxnSpPr>
-        <p:spPr>
-          <a:xfrm flipV="1">
-            <a:off x="8808372" y="2827205"/>
-            <a:ext cx="1808248" cy="670570"/>
-          </a:xfrm>
-          <a:prstGeom prst="line">
-            <a:avLst/>
-          </a:prstGeom>
-          <a:ln w="19050">
-            <a:solidFill>
-              <a:srgbClr val="E11D48"/>
-            </a:solidFill>
-            <a:headEnd type="triangle"/>
-          </a:ln>
-        </p:spPr>
-      </p:cxnSp>
-      <p:cxnSp>
-        <p:nvCxnSpPr>
-          <p:cNvPr id="26" name="Connector 26"/>
-          <p:cNvCxnSpPr/>
-          <p:nvPr/>
-        </p:nvCxnSpPr>
-        <p:spPr>
-          <a:xfrm flipH="1">
-            <a:off x="5191875" y="2827205"/>
-            <a:ext cx="5424744" cy="1"/>
-          </a:xfrm>
-          <a:prstGeom prst="line">
-            <a:avLst/>
-          </a:prstGeom>
-          <a:ln w="19050">
-            <a:solidFill>
-              <a:srgbClr val="E11D48"/>
-            </a:solidFill>
-            <a:headEnd type="triangle"/>
-          </a:ln>
-        </p:spPr>
-      </p:cxnSp>
-      <p:sp>
-        <p:nvSpPr>
-          <p:cNvPr id="27" name="Node audience_segments"/>
+      <p:sp>
+        <p:nvSpPr>
+          <p:cNvPr id="24" name="Node audience_segments"/>
           <p:cNvSpPr/>
           <p:nvPr/>
         </p:nvSpPr>
         <p:spPr>
           <a:xfrm>
             <a:off x="911973" y="2560697"/>
-            <a:ext cx="1326812" cy="533017"/>
+            <a:ext cx="1688462" cy="533017"/>
           </a:xfrm>
           <a:prstGeom prst="roundRect">
             <a:avLst/>
@@ -958,14 +858,14 @@
       </p:sp>
       <p:sp>
         <p:nvSpPr>
-          <p:cNvPr id="28" name="Node audience_jobs"/>
+          <p:cNvPr id="25" name="Node audience_jobs"/>
           <p:cNvSpPr/>
           <p:nvPr/>
         </p:nvSpPr>
         <p:spPr>
           <a:xfrm>
             <a:off x="911973" y="3231267"/>
-            <a:ext cx="1326812" cy="533017"/>
+            <a:ext cx="1688462" cy="533017"/>
           </a:xfrm>
           <a:prstGeom prst="roundRect">
             <a:avLst/>
@@ -1008,14 +908,14 @@
       </p:sp>
       <p:sp>
         <p:nvSpPr>
-          <p:cNvPr id="29" name="Node insight_editable"/>
-          <p:cNvSpPr/>
-          <p:nvPr/>
-        </p:nvSpPr>
-        <p:spPr>
-          <a:xfrm>
-            <a:off x="2720221" y="2560697"/>
-            <a:ext cx="1326812" cy="533017"/>
+          <p:cNvPr id="26" name="Node insight_editable"/>
+          <p:cNvSpPr/>
+          <p:nvPr/>
+        </p:nvSpPr>
+        <p:spPr>
+          <a:xfrm>
+            <a:off x="3081871" y="2560697"/>
+            <a:ext cx="1688462" cy="533017"/>
           </a:xfrm>
           <a:prstGeom prst="roundRect">
             <a:avLst/>
@@ -1058,14 +958,14 @@
       </p:sp>
       <p:sp>
         <p:nvSpPr>
-          <p:cNvPr id="30" name="Node insight_friction"/>
-          <p:cNvSpPr/>
-          <p:nvPr/>
-        </p:nvSpPr>
-        <p:spPr>
-          <a:xfrm>
-            <a:off x="2720221" y="3231267"/>
-            <a:ext cx="1326812" cy="533017"/>
+          <p:cNvPr id="27" name="Node insight_friction"/>
+          <p:cNvSpPr/>
+          <p:nvPr/>
+        </p:nvSpPr>
+        <p:spPr>
+          <a:xfrm>
+            <a:off x="3081871" y="3231267"/>
+            <a:ext cx="1688462" cy="533017"/>
           </a:xfrm>
           <a:prstGeom prst="roundRect">
             <a:avLst/>
@@ -1108,14 +1008,14 @@
       </p:sp>
       <p:sp>
         <p:nvSpPr>
-          <p:cNvPr id="31" name="Node message_positioning"/>
-          <p:cNvSpPr/>
-          <p:nvPr/>
-        </p:nvSpPr>
-        <p:spPr>
-          <a:xfrm>
-            <a:off x="4528469" y="2560697"/>
-            <a:ext cx="1326812" cy="533017"/>
+          <p:cNvPr id="28" name="Node message_position"/>
+          <p:cNvSpPr/>
+          <p:nvPr/>
+        </p:nvSpPr>
+        <p:spPr>
+          <a:xfrm>
+            <a:off x="5251768" y="2560697"/>
+            <a:ext cx="1688462" cy="533017"/>
           </a:xfrm>
           <a:prstGeom prst="roundRect">
             <a:avLst/>
@@ -1158,14 +1058,14 @@
       </p:sp>
       <p:sp>
         <p:nvSpPr>
-          <p:cNvPr id="32" name="Node message_proof"/>
-          <p:cNvSpPr/>
-          <p:nvPr/>
-        </p:nvSpPr>
-        <p:spPr>
-          <a:xfrm>
-            <a:off x="4528469" y="3231267"/>
-            <a:ext cx="1326812" cy="533017"/>
+          <p:cNvPr id="29" name="Node message_proof"/>
+          <p:cNvSpPr/>
+          <p:nvPr/>
+        </p:nvSpPr>
+        <p:spPr>
+          <a:xfrm>
+            <a:off x="5251768" y="3231267"/>
+            <a:ext cx="1688462" cy="533017"/>
           </a:xfrm>
           <a:prstGeom prst="roundRect">
             <a:avLst/>
@@ -1190,32 +1090,21 @@
                   <a:srgbClr val="111827"/>
                 </a:solidFill>
               </a:rPr>
-              <a:t>Show before and</a:t>
-            </a:r>
-          </a:p>
-          <a:p>
-            <a:pPr algn="ctr"/>
-            <a:r>
-              <a:rPr lang="en-US" sz="1050">
-                <a:solidFill>
-                  <a:srgbClr val="111827"/>
-                </a:solidFill>
-              </a:rPr>
-              <a:t>after</a:t>
-            </a:r>
-          </a:p>
-        </p:txBody>
-      </p:sp>
-      <p:sp>
-        <p:nvSpPr>
-          <p:cNvPr id="33" name="Node channels_github"/>
-          <p:cNvSpPr/>
-          <p:nvPr/>
-        </p:nvSpPr>
-        <p:spPr>
-          <a:xfrm>
-            <a:off x="6336717" y="2560697"/>
-            <a:ext cx="1326812" cy="533017"/>
+              <a:t>Show demo proof</a:t>
+            </a:r>
+          </a:p>
+        </p:txBody>
+      </p:sp>
+      <p:sp>
+        <p:nvSpPr>
+          <p:cNvPr id="30" name="Node channels_github"/>
+          <p:cNvSpPr/>
+          <p:nvPr/>
+        </p:nvSpPr>
+        <p:spPr>
+          <a:xfrm>
+            <a:off x="7421666" y="2560697"/>
+            <a:ext cx="1688462" cy="533017"/>
           </a:xfrm>
           <a:prstGeom prst="roundRect">
             <a:avLst/>
@@ -1240,21 +1129,21 @@
                   <a:srgbClr val="111827"/>
                 </a:solidFill>
               </a:rPr>
-              <a:t>Use GitHub as hub</a:t>
-            </a:r>
-          </a:p>
-        </p:txBody>
-      </p:sp>
-      <p:sp>
-        <p:nvSpPr>
-          <p:cNvPr id="34" name="Node channels_content"/>
-          <p:cNvSpPr/>
-          <p:nvPr/>
-        </p:nvSpPr>
-        <p:spPr>
-          <a:xfrm>
-            <a:off x="6336717" y="3231267"/>
-            <a:ext cx="1326812" cy="533017"/>
+              <a:t>Use GitHub hub</a:t>
+            </a:r>
+          </a:p>
+        </p:txBody>
+      </p:sp>
+      <p:sp>
+        <p:nvSpPr>
+          <p:cNvPr id="31" name="Node channels_content"/>
+          <p:cNvSpPr/>
+          <p:nvPr/>
+        </p:nvSpPr>
+        <p:spPr>
+          <a:xfrm>
+            <a:off x="7421666" y="3231267"/>
+            <a:ext cx="1688462" cy="533017"/>
           </a:xfrm>
           <a:prstGeom prst="roundRect">
             <a:avLst/>
@@ -1297,14 +1186,14 @@
       </p:sp>
       <p:sp>
         <p:nvSpPr>
-          <p:cNvPr id="35" name="Node measurement_metrics"/>
-          <p:cNvSpPr/>
-          <p:nvPr/>
-        </p:nvSpPr>
-        <p:spPr>
-          <a:xfrm>
-            <a:off x="8144965" y="2560697"/>
-            <a:ext cx="1326812" cy="533017"/>
+          <p:cNvPr id="32" name="Node measure_metrics"/>
+          <p:cNvSpPr/>
+          <p:nvPr/>
+        </p:nvSpPr>
+        <p:spPr>
+          <a:xfrm>
+            <a:off x="9591564" y="2560697"/>
+            <a:ext cx="1688462" cy="533017"/>
           </a:xfrm>
           <a:prstGeom prst="roundRect">
             <a:avLst/>
@@ -1347,14 +1236,14 @@
       </p:sp>
       <p:sp>
         <p:nvSpPr>
-          <p:cNvPr id="36" name="Node measurement_feedback"/>
-          <p:cNvSpPr/>
-          <p:nvPr/>
-        </p:nvSpPr>
-        <p:spPr>
-          <a:xfrm>
-            <a:off x="8144965" y="3231267"/>
-            <a:ext cx="1326812" cy="533017"/>
+          <p:cNvPr id="33" name="Node measure_feedback"/>
+          <p:cNvSpPr/>
+          <p:nvPr/>
+        </p:nvSpPr>
+        <p:spPr>
+          <a:xfrm>
+            <a:off x="9591564" y="3231267"/>
+            <a:ext cx="1688462" cy="533017"/>
           </a:xfrm>
           <a:prstGeom prst="roundRect">
             <a:avLst/>
@@ -1379,68 +1268,7 @@
                   <a:srgbClr val="111827"/>
                 </a:solidFill>
               </a:rPr>
-              <a:t>Collect quality</a:t>
-            </a:r>
-          </a:p>
-          <a:p>
-            <a:pPr algn="ctr"/>
-            <a:r>
-              <a:rPr lang="en-US" sz="1050">
-                <a:solidFill>
-                  <a:srgbClr val="111827"/>
-                </a:solidFill>
-              </a:rPr>
-              <a:t>feedback</a:t>
-            </a:r>
-          </a:p>
-        </p:txBody>
-      </p:sp>
-      <p:sp>
-        <p:nvSpPr>
-          <p:cNvPr id="37" name="Node optimization_route"/>
-          <p:cNvSpPr/>
-          <p:nvPr/>
-        </p:nvSpPr>
-        <p:spPr>
-          <a:xfrm>
-            <a:off x="9953213" y="2560697"/>
-            <a:ext cx="1326812" cy="533017"/>
-          </a:xfrm>
-          <a:prstGeom prst="roundRect">
-            <a:avLst/>
-          </a:prstGeom>
-          <a:solidFill>
-            <a:srgbClr val="FFFFFF"/>
-          </a:solidFill>
-          <a:ln w="12700">
-            <a:solidFill>
-              <a:srgbClr val="FB7185"/>
-            </a:solidFill>
-          </a:ln>
-        </p:spPr>
-        <p:txBody>
-          <a:bodyPr wrap="square" anchor="ctr"/>
-          <a:lstStyle/>
-          <a:p>
-            <a:pPr algn="ctr"/>
-            <a:r>
-              <a:rPr lang="en-US" sz="1050">
-                <a:solidFill>
-                  <a:srgbClr val="111827"/>
-                </a:solidFill>
-              </a:rPr>
-              <a:t>Optimize message</a:t>
-            </a:r>
-          </a:p>
-          <a:p>
-            <a:pPr algn="ctr"/>
-            <a:r>
-              <a:rPr lang="en-US" sz="1050">
-                <a:solidFill>
-                  <a:srgbClr val="111827"/>
-                </a:solidFill>
-              </a:rPr>
-              <a:t>route</a:t>
+              <a:t>Feed back issues</a:t>
             </a:r>
           </a:p>
         </p:txBody>
